--- a/tests/corpus/pptx/generated/objects.pptx
+++ b/tests/corpus/pptx/generated/objects.pptx
@@ -8,7 +8,6 @@
     <p:sldId id="256" r:id="rId2"/>
     <p:sldId id="257" r:id="rId3"/>
     <p:sldId id="258" r:id="rId4"/>
-    <p:sldId id="259" r:id="rId5"/>
   </p:sldIdLst>
   <p:sldSz cx="12192000" cy="6858000"/>
   <p:notesSz cx="6858000" cy="9144000"/>
@@ -132,7 +131,7 @@
           <p:cNvPr id="2" name="Titel 1">
             <a:extLst>
               <a:ext uri="{FF2B5EF4-FFF2-40B4-BE49-F238E27FC236}">
-                <a16:creationId xmlns:a16="http://schemas.microsoft.com/office/drawing/2014/main" id="{84462791-BD0D-7B6E-31F3-8599CE09AC83}"/>
+                <a16:creationId xmlns:a16="http://schemas.microsoft.com/office/drawing/2014/main" id="{7FDEEC92-8487-40FB-7D63-92E593947D8F}"/>
               </a:ext>
             </a:extLst>
           </p:cNvPr>
@@ -169,7 +168,7 @@
           <p:cNvPr id="3" name="Untertitel 2">
             <a:extLst>
               <a:ext uri="{FF2B5EF4-FFF2-40B4-BE49-F238E27FC236}">
-                <a16:creationId xmlns:a16="http://schemas.microsoft.com/office/drawing/2014/main" id="{1F1B22AF-DBE0-9267-F72A-3CB78D7AE995}"/>
+                <a16:creationId xmlns:a16="http://schemas.microsoft.com/office/drawing/2014/main" id="{0A5E743D-13FE-C9CD-099E-C6D2B307E59C}"/>
               </a:ext>
             </a:extLst>
           </p:cNvPr>
@@ -239,7 +238,7 @@
           <p:cNvPr id="4" name="Datumsplatzhalter 3">
             <a:extLst>
               <a:ext uri="{FF2B5EF4-FFF2-40B4-BE49-F238E27FC236}">
-                <a16:creationId xmlns:a16="http://schemas.microsoft.com/office/drawing/2014/main" id="{00825A33-E4D7-9B47-D276-2C6D7122FB53}"/>
+                <a16:creationId xmlns:a16="http://schemas.microsoft.com/office/drawing/2014/main" id="{F7CF293B-6AE9-7791-90F2-C0CF5CBE9586}"/>
               </a:ext>
             </a:extLst>
           </p:cNvPr>
@@ -255,7 +254,7 @@
           <a:bodyPr/>
           <a:lstStyle/>
           <a:p>
-            <a:fld id="{081FD6A1-9468-4C5D-9F84-F69311F8BE43}" type="datetimeFigureOut">
+            <a:fld id="{EB0DE66F-2E1A-48BE-8876-66A3D9EE38A7}" type="datetimeFigureOut">
               <a:rPr lang="de-DE" smtClean="0"/>
               <a:t>08.10.2026</a:t>
             </a:fld>
@@ -268,7 +267,7 @@
           <p:cNvPr id="5" name="Fußzeilenplatzhalter 4">
             <a:extLst>
               <a:ext uri="{FF2B5EF4-FFF2-40B4-BE49-F238E27FC236}">
-                <a16:creationId xmlns:a16="http://schemas.microsoft.com/office/drawing/2014/main" id="{B0BBB85E-F297-CF6E-1954-43D8A1FCE11D}"/>
+                <a16:creationId xmlns:a16="http://schemas.microsoft.com/office/drawing/2014/main" id="{33991C0F-2941-4D0E-8726-658D11082B9F}"/>
               </a:ext>
             </a:extLst>
           </p:cNvPr>
@@ -293,7 +292,7 @@
           <p:cNvPr id="6" name="Foliennummernplatzhalter 5">
             <a:extLst>
               <a:ext uri="{FF2B5EF4-FFF2-40B4-BE49-F238E27FC236}">
-                <a16:creationId xmlns:a16="http://schemas.microsoft.com/office/drawing/2014/main" id="{B18CAA0D-0E9A-F63D-B235-188BF2BDD994}"/>
+                <a16:creationId xmlns:a16="http://schemas.microsoft.com/office/drawing/2014/main" id="{4172636A-68C9-C5BF-0CDE-203CD771D93E}"/>
               </a:ext>
             </a:extLst>
           </p:cNvPr>
@@ -309,7 +308,7 @@
           <a:bodyPr/>
           <a:lstStyle/>
           <a:p>
-            <a:fld id="{A54C93F7-1D14-45B6-B029-7B0271738C98}" type="slidenum">
+            <a:fld id="{79D103F6-AF16-461F-9E44-EE55414EE681}" type="slidenum">
               <a:rPr lang="de-DE" smtClean="0"/>
               <a:t>‹Nr.›</a:t>
             </a:fld>
@@ -320,7 +319,7 @@
     </p:spTree>
     <p:extLst>
       <p:ext uri="{BB962C8B-B14F-4D97-AF65-F5344CB8AC3E}">
-        <p14:creationId xmlns:p14="http://schemas.microsoft.com/office/powerpoint/2010/main" val="3199735454"/>
+        <p14:creationId xmlns:p14="http://schemas.microsoft.com/office/powerpoint/2010/main" val="1508380048"/>
       </p:ext>
     </p:extLst>
   </p:cSld>
@@ -352,7 +351,7 @@
           <p:cNvPr id="2" name="Titel 1">
             <a:extLst>
               <a:ext uri="{FF2B5EF4-FFF2-40B4-BE49-F238E27FC236}">
-                <a16:creationId xmlns:a16="http://schemas.microsoft.com/office/drawing/2014/main" id="{181249FD-DF95-F68F-3465-0E9BAA41BCE5}"/>
+                <a16:creationId xmlns:a16="http://schemas.microsoft.com/office/drawing/2014/main" id="{2A48A3CB-DAF1-CED5-E0AF-6AC2157D576A}"/>
               </a:ext>
             </a:extLst>
           </p:cNvPr>
@@ -380,7 +379,7 @@
           <p:cNvPr id="3" name="Vertikaler Textplatzhalter 2">
             <a:extLst>
               <a:ext uri="{FF2B5EF4-FFF2-40B4-BE49-F238E27FC236}">
-                <a16:creationId xmlns:a16="http://schemas.microsoft.com/office/drawing/2014/main" id="{ED2A33EF-8C0D-4E79-6469-AC57BBBE1F13}"/>
+                <a16:creationId xmlns:a16="http://schemas.microsoft.com/office/drawing/2014/main" id="{8E1ED384-B8A1-5D00-ABF9-4FB502F7EE7C}"/>
               </a:ext>
             </a:extLst>
           </p:cNvPr>
@@ -437,7 +436,7 @@
           <p:cNvPr id="4" name="Datumsplatzhalter 3">
             <a:extLst>
               <a:ext uri="{FF2B5EF4-FFF2-40B4-BE49-F238E27FC236}">
-                <a16:creationId xmlns:a16="http://schemas.microsoft.com/office/drawing/2014/main" id="{1F42C8B1-4829-F38F-B1D7-AFE6DBA0E175}"/>
+                <a16:creationId xmlns:a16="http://schemas.microsoft.com/office/drawing/2014/main" id="{02CED8F7-FB6D-E7C9-A129-5C349EAB6FD6}"/>
               </a:ext>
             </a:extLst>
           </p:cNvPr>
@@ -453,7 +452,7 @@
           <a:bodyPr/>
           <a:lstStyle/>
           <a:p>
-            <a:fld id="{081FD6A1-9468-4C5D-9F84-F69311F8BE43}" type="datetimeFigureOut">
+            <a:fld id="{EB0DE66F-2E1A-48BE-8876-66A3D9EE38A7}" type="datetimeFigureOut">
               <a:rPr lang="de-DE" smtClean="0"/>
               <a:t>08.10.2026</a:t>
             </a:fld>
@@ -466,7 +465,7 @@
           <p:cNvPr id="5" name="Fußzeilenplatzhalter 4">
             <a:extLst>
               <a:ext uri="{FF2B5EF4-FFF2-40B4-BE49-F238E27FC236}">
-                <a16:creationId xmlns:a16="http://schemas.microsoft.com/office/drawing/2014/main" id="{919CE8E6-A683-49D5-B1B9-180F398CDAC2}"/>
+                <a16:creationId xmlns:a16="http://schemas.microsoft.com/office/drawing/2014/main" id="{0E08E29C-FF0E-2B84-6590-B8D9B6E4316B}"/>
               </a:ext>
             </a:extLst>
           </p:cNvPr>
@@ -491,7 +490,7 @@
           <p:cNvPr id="6" name="Foliennummernplatzhalter 5">
             <a:extLst>
               <a:ext uri="{FF2B5EF4-FFF2-40B4-BE49-F238E27FC236}">
-                <a16:creationId xmlns:a16="http://schemas.microsoft.com/office/drawing/2014/main" id="{28D98F8E-7AB6-7673-F3E6-C9C56B557BF7}"/>
+                <a16:creationId xmlns:a16="http://schemas.microsoft.com/office/drawing/2014/main" id="{1BA30B81-44A1-333C-8491-F1C06BA3187A}"/>
               </a:ext>
             </a:extLst>
           </p:cNvPr>
@@ -507,7 +506,7 @@
           <a:bodyPr/>
           <a:lstStyle/>
           <a:p>
-            <a:fld id="{A54C93F7-1D14-45B6-B029-7B0271738C98}" type="slidenum">
+            <a:fld id="{79D103F6-AF16-461F-9E44-EE55414EE681}" type="slidenum">
               <a:rPr lang="de-DE" smtClean="0"/>
               <a:t>‹Nr.›</a:t>
             </a:fld>
@@ -518,7 +517,7 @@
     </p:spTree>
     <p:extLst>
       <p:ext uri="{BB962C8B-B14F-4D97-AF65-F5344CB8AC3E}">
-        <p14:creationId xmlns:p14="http://schemas.microsoft.com/office/powerpoint/2010/main" val="3701311"/>
+        <p14:creationId xmlns:p14="http://schemas.microsoft.com/office/powerpoint/2010/main" val="2223449635"/>
       </p:ext>
     </p:extLst>
   </p:cSld>
@@ -550,7 +549,7 @@
           <p:cNvPr id="2" name="Vertikaler Titel 1">
             <a:extLst>
               <a:ext uri="{FF2B5EF4-FFF2-40B4-BE49-F238E27FC236}">
-                <a16:creationId xmlns:a16="http://schemas.microsoft.com/office/drawing/2014/main" id="{9A329DFC-8DE4-38BB-F265-E6079A53139E}"/>
+                <a16:creationId xmlns:a16="http://schemas.microsoft.com/office/drawing/2014/main" id="{18FD157E-1215-7461-B3B1-2C8377EFA720}"/>
               </a:ext>
             </a:extLst>
           </p:cNvPr>
@@ -583,7 +582,7 @@
           <p:cNvPr id="3" name="Vertikaler Textplatzhalter 2">
             <a:extLst>
               <a:ext uri="{FF2B5EF4-FFF2-40B4-BE49-F238E27FC236}">
-                <a16:creationId xmlns:a16="http://schemas.microsoft.com/office/drawing/2014/main" id="{D318D028-DBF7-7DDD-3EEC-4B4DC5B0129F}"/>
+                <a16:creationId xmlns:a16="http://schemas.microsoft.com/office/drawing/2014/main" id="{9805EABF-AA8B-E853-3C1F-02A44AAA0E5E}"/>
               </a:ext>
             </a:extLst>
           </p:cNvPr>
@@ -645,7 +644,7 @@
           <p:cNvPr id="4" name="Datumsplatzhalter 3">
             <a:extLst>
               <a:ext uri="{FF2B5EF4-FFF2-40B4-BE49-F238E27FC236}">
-                <a16:creationId xmlns:a16="http://schemas.microsoft.com/office/drawing/2014/main" id="{2F40B206-FCAB-A9CD-3B08-F25DDF4BE4F5}"/>
+                <a16:creationId xmlns:a16="http://schemas.microsoft.com/office/drawing/2014/main" id="{CF48BD6A-431D-905F-DBD4-4E74E6D1FF91}"/>
               </a:ext>
             </a:extLst>
           </p:cNvPr>
@@ -661,7 +660,7 @@
           <a:bodyPr/>
           <a:lstStyle/>
           <a:p>
-            <a:fld id="{081FD6A1-9468-4C5D-9F84-F69311F8BE43}" type="datetimeFigureOut">
+            <a:fld id="{EB0DE66F-2E1A-48BE-8876-66A3D9EE38A7}" type="datetimeFigureOut">
               <a:rPr lang="de-DE" smtClean="0"/>
               <a:t>08.10.2026</a:t>
             </a:fld>
@@ -674,7 +673,7 @@
           <p:cNvPr id="5" name="Fußzeilenplatzhalter 4">
             <a:extLst>
               <a:ext uri="{FF2B5EF4-FFF2-40B4-BE49-F238E27FC236}">
-                <a16:creationId xmlns:a16="http://schemas.microsoft.com/office/drawing/2014/main" id="{F9466EC7-D752-F083-43C5-F42CFC1B9A1B}"/>
+                <a16:creationId xmlns:a16="http://schemas.microsoft.com/office/drawing/2014/main" id="{51F8CCE9-3CC9-FE93-D704-E4D8DF538EAC}"/>
               </a:ext>
             </a:extLst>
           </p:cNvPr>
@@ -699,7 +698,7 @@
           <p:cNvPr id="6" name="Foliennummernplatzhalter 5">
             <a:extLst>
               <a:ext uri="{FF2B5EF4-FFF2-40B4-BE49-F238E27FC236}">
-                <a16:creationId xmlns:a16="http://schemas.microsoft.com/office/drawing/2014/main" id="{E55B4213-767D-F3C2-D9BE-B379537F0B26}"/>
+                <a16:creationId xmlns:a16="http://schemas.microsoft.com/office/drawing/2014/main" id="{25A510B2-4972-307F-37BB-4F26DAC0846A}"/>
               </a:ext>
             </a:extLst>
           </p:cNvPr>
@@ -715,7 +714,7 @@
           <a:bodyPr/>
           <a:lstStyle/>
           <a:p>
-            <a:fld id="{A54C93F7-1D14-45B6-B029-7B0271738C98}" type="slidenum">
+            <a:fld id="{79D103F6-AF16-461F-9E44-EE55414EE681}" type="slidenum">
               <a:rPr lang="de-DE" smtClean="0"/>
               <a:t>‹Nr.›</a:t>
             </a:fld>
@@ -726,7 +725,7 @@
     </p:spTree>
     <p:extLst>
       <p:ext uri="{BB962C8B-B14F-4D97-AF65-F5344CB8AC3E}">
-        <p14:creationId xmlns:p14="http://schemas.microsoft.com/office/powerpoint/2010/main" val="871323610"/>
+        <p14:creationId xmlns:p14="http://schemas.microsoft.com/office/powerpoint/2010/main" val="662321295"/>
       </p:ext>
     </p:extLst>
   </p:cSld>
@@ -758,7 +757,7 @@
           <p:cNvPr id="2" name="Titel 1">
             <a:extLst>
               <a:ext uri="{FF2B5EF4-FFF2-40B4-BE49-F238E27FC236}">
-                <a16:creationId xmlns:a16="http://schemas.microsoft.com/office/drawing/2014/main" id="{E5F2FD8D-372D-3C64-22D7-AD02D29B92A5}"/>
+                <a16:creationId xmlns:a16="http://schemas.microsoft.com/office/drawing/2014/main" id="{F187F301-4BBC-13C4-6FF5-84E4EE67C001}"/>
               </a:ext>
             </a:extLst>
           </p:cNvPr>
@@ -786,7 +785,7 @@
           <p:cNvPr id="3" name="Inhaltsplatzhalter 2">
             <a:extLst>
               <a:ext uri="{FF2B5EF4-FFF2-40B4-BE49-F238E27FC236}">
-                <a16:creationId xmlns:a16="http://schemas.microsoft.com/office/drawing/2014/main" id="{9BB728D1-0A38-3D1D-BE2B-D88C6DE350A3}"/>
+                <a16:creationId xmlns:a16="http://schemas.microsoft.com/office/drawing/2014/main" id="{EDD362EB-8E0F-3913-5A35-22B8F5B954F1}"/>
               </a:ext>
             </a:extLst>
           </p:cNvPr>
@@ -843,7 +842,7 @@
           <p:cNvPr id="4" name="Datumsplatzhalter 3">
             <a:extLst>
               <a:ext uri="{FF2B5EF4-FFF2-40B4-BE49-F238E27FC236}">
-                <a16:creationId xmlns:a16="http://schemas.microsoft.com/office/drawing/2014/main" id="{EF97B3C5-7A50-5C7F-BF44-CAA37061CD79}"/>
+                <a16:creationId xmlns:a16="http://schemas.microsoft.com/office/drawing/2014/main" id="{904A2E54-8A6A-084F-70D0-1D0613781811}"/>
               </a:ext>
             </a:extLst>
           </p:cNvPr>
@@ -859,7 +858,7 @@
           <a:bodyPr/>
           <a:lstStyle/>
           <a:p>
-            <a:fld id="{081FD6A1-9468-4C5D-9F84-F69311F8BE43}" type="datetimeFigureOut">
+            <a:fld id="{EB0DE66F-2E1A-48BE-8876-66A3D9EE38A7}" type="datetimeFigureOut">
               <a:rPr lang="de-DE" smtClean="0"/>
               <a:t>08.10.2026</a:t>
             </a:fld>
@@ -872,7 +871,7 @@
           <p:cNvPr id="5" name="Fußzeilenplatzhalter 4">
             <a:extLst>
               <a:ext uri="{FF2B5EF4-FFF2-40B4-BE49-F238E27FC236}">
-                <a16:creationId xmlns:a16="http://schemas.microsoft.com/office/drawing/2014/main" id="{42F06676-27A0-1D3B-26D4-6924CE709863}"/>
+                <a16:creationId xmlns:a16="http://schemas.microsoft.com/office/drawing/2014/main" id="{44E5AF85-0AC3-BBA7-F072-F2A178425F28}"/>
               </a:ext>
             </a:extLst>
           </p:cNvPr>
@@ -897,7 +896,7 @@
           <p:cNvPr id="6" name="Foliennummernplatzhalter 5">
             <a:extLst>
               <a:ext uri="{FF2B5EF4-FFF2-40B4-BE49-F238E27FC236}">
-                <a16:creationId xmlns:a16="http://schemas.microsoft.com/office/drawing/2014/main" id="{1C0A0C36-7F3A-A191-5656-3A3FE176C684}"/>
+                <a16:creationId xmlns:a16="http://schemas.microsoft.com/office/drawing/2014/main" id="{A3C00AD7-8E64-F4D8-639A-E48B4240D201}"/>
               </a:ext>
             </a:extLst>
           </p:cNvPr>
@@ -913,7 +912,7 @@
           <a:bodyPr/>
           <a:lstStyle/>
           <a:p>
-            <a:fld id="{A54C93F7-1D14-45B6-B029-7B0271738C98}" type="slidenum">
+            <a:fld id="{79D103F6-AF16-461F-9E44-EE55414EE681}" type="slidenum">
               <a:rPr lang="de-DE" smtClean="0"/>
               <a:t>‹Nr.›</a:t>
             </a:fld>
@@ -924,7 +923,7 @@
     </p:spTree>
     <p:extLst>
       <p:ext uri="{BB962C8B-B14F-4D97-AF65-F5344CB8AC3E}">
-        <p14:creationId xmlns:p14="http://schemas.microsoft.com/office/powerpoint/2010/main" val="2333201512"/>
+        <p14:creationId xmlns:p14="http://schemas.microsoft.com/office/powerpoint/2010/main" val="77961642"/>
       </p:ext>
     </p:extLst>
   </p:cSld>
@@ -956,7 +955,7 @@
           <p:cNvPr id="2" name="Titel 1">
             <a:extLst>
               <a:ext uri="{FF2B5EF4-FFF2-40B4-BE49-F238E27FC236}">
-                <a16:creationId xmlns:a16="http://schemas.microsoft.com/office/drawing/2014/main" id="{20890751-E571-E6AC-4F89-FF75070E2BEC}"/>
+                <a16:creationId xmlns:a16="http://schemas.microsoft.com/office/drawing/2014/main" id="{0B177304-31BD-FAB6-B734-DFC4FE9B7D7A}"/>
               </a:ext>
             </a:extLst>
           </p:cNvPr>
@@ -993,7 +992,7 @@
           <p:cNvPr id="3" name="Textplatzhalter 2">
             <a:extLst>
               <a:ext uri="{FF2B5EF4-FFF2-40B4-BE49-F238E27FC236}">
-                <a16:creationId xmlns:a16="http://schemas.microsoft.com/office/drawing/2014/main" id="{8D95B2FA-42E0-615F-431D-5756F2E482E5}"/>
+                <a16:creationId xmlns:a16="http://schemas.microsoft.com/office/drawing/2014/main" id="{51760C9F-360D-D724-9B7B-80514C0CD3A0}"/>
               </a:ext>
             </a:extLst>
           </p:cNvPr>
@@ -1118,7 +1117,7 @@
           <p:cNvPr id="4" name="Datumsplatzhalter 3">
             <a:extLst>
               <a:ext uri="{FF2B5EF4-FFF2-40B4-BE49-F238E27FC236}">
-                <a16:creationId xmlns:a16="http://schemas.microsoft.com/office/drawing/2014/main" id="{FA62AD24-CD08-21E8-5F95-7A18EDD33E58}"/>
+                <a16:creationId xmlns:a16="http://schemas.microsoft.com/office/drawing/2014/main" id="{B14FB958-F018-DFFE-8324-C063C938B0E0}"/>
               </a:ext>
             </a:extLst>
           </p:cNvPr>
@@ -1134,7 +1133,7 @@
           <a:bodyPr/>
           <a:lstStyle/>
           <a:p>
-            <a:fld id="{081FD6A1-9468-4C5D-9F84-F69311F8BE43}" type="datetimeFigureOut">
+            <a:fld id="{EB0DE66F-2E1A-48BE-8876-66A3D9EE38A7}" type="datetimeFigureOut">
               <a:rPr lang="de-DE" smtClean="0"/>
               <a:t>08.10.2026</a:t>
             </a:fld>
@@ -1147,7 +1146,7 @@
           <p:cNvPr id="5" name="Fußzeilenplatzhalter 4">
             <a:extLst>
               <a:ext uri="{FF2B5EF4-FFF2-40B4-BE49-F238E27FC236}">
-                <a16:creationId xmlns:a16="http://schemas.microsoft.com/office/drawing/2014/main" id="{0F523F69-C866-372A-3D68-441B8BC97B8B}"/>
+                <a16:creationId xmlns:a16="http://schemas.microsoft.com/office/drawing/2014/main" id="{62C66AFB-9C0E-350B-1E27-31A75756CDF0}"/>
               </a:ext>
             </a:extLst>
           </p:cNvPr>
@@ -1172,7 +1171,7 @@
           <p:cNvPr id="6" name="Foliennummernplatzhalter 5">
             <a:extLst>
               <a:ext uri="{FF2B5EF4-FFF2-40B4-BE49-F238E27FC236}">
-                <a16:creationId xmlns:a16="http://schemas.microsoft.com/office/drawing/2014/main" id="{AFB7E810-0F78-4A81-1EF6-DF6A061F6A52}"/>
+                <a16:creationId xmlns:a16="http://schemas.microsoft.com/office/drawing/2014/main" id="{6AF73CC5-38A2-A3E1-E0EB-160F25E699F6}"/>
               </a:ext>
             </a:extLst>
           </p:cNvPr>
@@ -1188,7 +1187,7 @@
           <a:bodyPr/>
           <a:lstStyle/>
           <a:p>
-            <a:fld id="{A54C93F7-1D14-45B6-B029-7B0271738C98}" type="slidenum">
+            <a:fld id="{79D103F6-AF16-461F-9E44-EE55414EE681}" type="slidenum">
               <a:rPr lang="de-DE" smtClean="0"/>
               <a:t>‹Nr.›</a:t>
             </a:fld>
@@ -1199,7 +1198,7 @@
     </p:spTree>
     <p:extLst>
       <p:ext uri="{BB962C8B-B14F-4D97-AF65-F5344CB8AC3E}">
-        <p14:creationId xmlns:p14="http://schemas.microsoft.com/office/powerpoint/2010/main" val="1638406324"/>
+        <p14:creationId xmlns:p14="http://schemas.microsoft.com/office/powerpoint/2010/main" val="3950921791"/>
       </p:ext>
     </p:extLst>
   </p:cSld>
@@ -1231,7 +1230,7 @@
           <p:cNvPr id="2" name="Titel 1">
             <a:extLst>
               <a:ext uri="{FF2B5EF4-FFF2-40B4-BE49-F238E27FC236}">
-                <a16:creationId xmlns:a16="http://schemas.microsoft.com/office/drawing/2014/main" id="{15C0CC6A-B59E-6D2D-B613-7F0B3B928B22}"/>
+                <a16:creationId xmlns:a16="http://schemas.microsoft.com/office/drawing/2014/main" id="{4AB21F87-D030-EAFA-E0F0-5EF86C92847F}"/>
               </a:ext>
             </a:extLst>
           </p:cNvPr>
@@ -1259,7 +1258,7 @@
           <p:cNvPr id="3" name="Inhaltsplatzhalter 2">
             <a:extLst>
               <a:ext uri="{FF2B5EF4-FFF2-40B4-BE49-F238E27FC236}">
-                <a16:creationId xmlns:a16="http://schemas.microsoft.com/office/drawing/2014/main" id="{24EF8F72-9BDF-676F-484C-A3ECBEA3DEED}"/>
+                <a16:creationId xmlns:a16="http://schemas.microsoft.com/office/drawing/2014/main" id="{055A6888-4F05-1317-EF86-07D805B79AEA}"/>
               </a:ext>
             </a:extLst>
           </p:cNvPr>
@@ -1321,7 +1320,7 @@
           <p:cNvPr id="4" name="Inhaltsplatzhalter 3">
             <a:extLst>
               <a:ext uri="{FF2B5EF4-FFF2-40B4-BE49-F238E27FC236}">
-                <a16:creationId xmlns:a16="http://schemas.microsoft.com/office/drawing/2014/main" id="{06624B21-EDA4-9794-B13C-ADBA460141C5}"/>
+                <a16:creationId xmlns:a16="http://schemas.microsoft.com/office/drawing/2014/main" id="{BFB95DA8-877F-6B0F-1647-BA96689C9911}"/>
               </a:ext>
             </a:extLst>
           </p:cNvPr>
@@ -1383,7 +1382,7 @@
           <p:cNvPr id="5" name="Datumsplatzhalter 4">
             <a:extLst>
               <a:ext uri="{FF2B5EF4-FFF2-40B4-BE49-F238E27FC236}">
-                <a16:creationId xmlns:a16="http://schemas.microsoft.com/office/drawing/2014/main" id="{BFC724A3-F6E2-C69B-21DC-1BD7B5378CAC}"/>
+                <a16:creationId xmlns:a16="http://schemas.microsoft.com/office/drawing/2014/main" id="{D36B9424-B063-AE9C-5781-24BEBF423825}"/>
               </a:ext>
             </a:extLst>
           </p:cNvPr>
@@ -1399,7 +1398,7 @@
           <a:bodyPr/>
           <a:lstStyle/>
           <a:p>
-            <a:fld id="{081FD6A1-9468-4C5D-9F84-F69311F8BE43}" type="datetimeFigureOut">
+            <a:fld id="{EB0DE66F-2E1A-48BE-8876-66A3D9EE38A7}" type="datetimeFigureOut">
               <a:rPr lang="de-DE" smtClean="0"/>
               <a:t>08.10.2026</a:t>
             </a:fld>
@@ -1412,7 +1411,7 @@
           <p:cNvPr id="6" name="Fußzeilenplatzhalter 5">
             <a:extLst>
               <a:ext uri="{FF2B5EF4-FFF2-40B4-BE49-F238E27FC236}">
-                <a16:creationId xmlns:a16="http://schemas.microsoft.com/office/drawing/2014/main" id="{8C31A7A4-4E5D-61D4-F4C3-1D000738FB25}"/>
+                <a16:creationId xmlns:a16="http://schemas.microsoft.com/office/drawing/2014/main" id="{727290C6-6213-1FA9-02BF-87A1090060B8}"/>
               </a:ext>
             </a:extLst>
           </p:cNvPr>
@@ -1437,7 +1436,7 @@
           <p:cNvPr id="7" name="Foliennummernplatzhalter 6">
             <a:extLst>
               <a:ext uri="{FF2B5EF4-FFF2-40B4-BE49-F238E27FC236}">
-                <a16:creationId xmlns:a16="http://schemas.microsoft.com/office/drawing/2014/main" id="{265D748E-D84C-2068-1696-708EBA99E0C3}"/>
+                <a16:creationId xmlns:a16="http://schemas.microsoft.com/office/drawing/2014/main" id="{F1608FCD-E31B-D134-417E-CDED613BAAF2}"/>
               </a:ext>
             </a:extLst>
           </p:cNvPr>
@@ -1453,7 +1452,7 @@
           <a:bodyPr/>
           <a:lstStyle/>
           <a:p>
-            <a:fld id="{A54C93F7-1D14-45B6-B029-7B0271738C98}" type="slidenum">
+            <a:fld id="{79D103F6-AF16-461F-9E44-EE55414EE681}" type="slidenum">
               <a:rPr lang="de-DE" smtClean="0"/>
               <a:t>‹Nr.›</a:t>
             </a:fld>
@@ -1464,7 +1463,7 @@
     </p:spTree>
     <p:extLst>
       <p:ext uri="{BB962C8B-B14F-4D97-AF65-F5344CB8AC3E}">
-        <p14:creationId xmlns:p14="http://schemas.microsoft.com/office/powerpoint/2010/main" val="414142128"/>
+        <p14:creationId xmlns:p14="http://schemas.microsoft.com/office/powerpoint/2010/main" val="2505036110"/>
       </p:ext>
     </p:extLst>
   </p:cSld>
@@ -1496,7 +1495,7 @@
           <p:cNvPr id="2" name="Titel 1">
             <a:extLst>
               <a:ext uri="{FF2B5EF4-FFF2-40B4-BE49-F238E27FC236}">
-                <a16:creationId xmlns:a16="http://schemas.microsoft.com/office/drawing/2014/main" id="{A461C7A6-B08E-FAC0-115F-827792AB58CD}"/>
+                <a16:creationId xmlns:a16="http://schemas.microsoft.com/office/drawing/2014/main" id="{73CA20C9-8B1C-D74E-40CF-958D897D0B5C}"/>
               </a:ext>
             </a:extLst>
           </p:cNvPr>
@@ -1529,7 +1528,7 @@
           <p:cNvPr id="3" name="Textplatzhalter 2">
             <a:extLst>
               <a:ext uri="{FF2B5EF4-FFF2-40B4-BE49-F238E27FC236}">
-                <a16:creationId xmlns:a16="http://schemas.microsoft.com/office/drawing/2014/main" id="{DADE5ED1-5991-0FA7-9891-73A31749B656}"/>
+                <a16:creationId xmlns:a16="http://schemas.microsoft.com/office/drawing/2014/main" id="{04F58DDB-76D8-55AA-CD2D-EC061217CFC1}"/>
               </a:ext>
             </a:extLst>
           </p:cNvPr>
@@ -1600,7 +1599,7 @@
           <p:cNvPr id="4" name="Inhaltsplatzhalter 3">
             <a:extLst>
               <a:ext uri="{FF2B5EF4-FFF2-40B4-BE49-F238E27FC236}">
-                <a16:creationId xmlns:a16="http://schemas.microsoft.com/office/drawing/2014/main" id="{6818BAC8-4D54-C459-DC8F-3B11A0713EA9}"/>
+                <a16:creationId xmlns:a16="http://schemas.microsoft.com/office/drawing/2014/main" id="{FCCF2E1C-1A76-F8DA-C517-98D9F0159B1A}"/>
               </a:ext>
             </a:extLst>
           </p:cNvPr>
@@ -1662,7 +1661,7 @@
           <p:cNvPr id="5" name="Textplatzhalter 4">
             <a:extLst>
               <a:ext uri="{FF2B5EF4-FFF2-40B4-BE49-F238E27FC236}">
-                <a16:creationId xmlns:a16="http://schemas.microsoft.com/office/drawing/2014/main" id="{2C4A5CAD-3940-4577-E1D1-6B845B76ABBB}"/>
+                <a16:creationId xmlns:a16="http://schemas.microsoft.com/office/drawing/2014/main" id="{78FE2C6F-6362-B693-F8C8-41D29DBEEDDB}"/>
               </a:ext>
             </a:extLst>
           </p:cNvPr>
@@ -1733,7 +1732,7 @@
           <p:cNvPr id="6" name="Inhaltsplatzhalter 5">
             <a:extLst>
               <a:ext uri="{FF2B5EF4-FFF2-40B4-BE49-F238E27FC236}">
-                <a16:creationId xmlns:a16="http://schemas.microsoft.com/office/drawing/2014/main" id="{D30DCDFB-5E90-1F21-59E7-592AFA6FB0AA}"/>
+                <a16:creationId xmlns:a16="http://schemas.microsoft.com/office/drawing/2014/main" id="{C8C74CB0-3080-6D30-B6A3-6872A5FEBC31}"/>
               </a:ext>
             </a:extLst>
           </p:cNvPr>
@@ -1795,7 +1794,7 @@
           <p:cNvPr id="7" name="Datumsplatzhalter 6">
             <a:extLst>
               <a:ext uri="{FF2B5EF4-FFF2-40B4-BE49-F238E27FC236}">
-                <a16:creationId xmlns:a16="http://schemas.microsoft.com/office/drawing/2014/main" id="{55934B24-202E-7336-B18B-B2A2A67D49CC}"/>
+                <a16:creationId xmlns:a16="http://schemas.microsoft.com/office/drawing/2014/main" id="{B3BFB2F8-6E93-8B41-3119-5FA665213097}"/>
               </a:ext>
             </a:extLst>
           </p:cNvPr>
@@ -1811,7 +1810,7 @@
           <a:bodyPr/>
           <a:lstStyle/>
           <a:p>
-            <a:fld id="{081FD6A1-9468-4C5D-9F84-F69311F8BE43}" type="datetimeFigureOut">
+            <a:fld id="{EB0DE66F-2E1A-48BE-8876-66A3D9EE38A7}" type="datetimeFigureOut">
               <a:rPr lang="de-DE" smtClean="0"/>
               <a:t>08.10.2026</a:t>
             </a:fld>
@@ -1824,7 +1823,7 @@
           <p:cNvPr id="8" name="Fußzeilenplatzhalter 7">
             <a:extLst>
               <a:ext uri="{FF2B5EF4-FFF2-40B4-BE49-F238E27FC236}">
-                <a16:creationId xmlns:a16="http://schemas.microsoft.com/office/drawing/2014/main" id="{3D8CF132-1A2A-B187-927F-4FF0C8D83A41}"/>
+                <a16:creationId xmlns:a16="http://schemas.microsoft.com/office/drawing/2014/main" id="{EE56E4B1-49BE-D1D0-A2B7-ED1789C629E2}"/>
               </a:ext>
             </a:extLst>
           </p:cNvPr>
@@ -1849,7 +1848,7 @@
           <p:cNvPr id="9" name="Foliennummernplatzhalter 8">
             <a:extLst>
               <a:ext uri="{FF2B5EF4-FFF2-40B4-BE49-F238E27FC236}">
-                <a16:creationId xmlns:a16="http://schemas.microsoft.com/office/drawing/2014/main" id="{775ADAD9-7FDE-29E4-E691-C9990249189A}"/>
+                <a16:creationId xmlns:a16="http://schemas.microsoft.com/office/drawing/2014/main" id="{090164C1-5AF3-8D78-D0BD-668A6ED81A77}"/>
               </a:ext>
             </a:extLst>
           </p:cNvPr>
@@ -1865,7 +1864,7 @@
           <a:bodyPr/>
           <a:lstStyle/>
           <a:p>
-            <a:fld id="{A54C93F7-1D14-45B6-B029-7B0271738C98}" type="slidenum">
+            <a:fld id="{79D103F6-AF16-461F-9E44-EE55414EE681}" type="slidenum">
               <a:rPr lang="de-DE" smtClean="0"/>
               <a:t>‹Nr.›</a:t>
             </a:fld>
@@ -1876,7 +1875,7 @@
     </p:spTree>
     <p:extLst>
       <p:ext uri="{BB962C8B-B14F-4D97-AF65-F5344CB8AC3E}">
-        <p14:creationId xmlns:p14="http://schemas.microsoft.com/office/powerpoint/2010/main" val="3431052180"/>
+        <p14:creationId xmlns:p14="http://schemas.microsoft.com/office/powerpoint/2010/main" val="2938230737"/>
       </p:ext>
     </p:extLst>
   </p:cSld>
@@ -1908,7 +1907,7 @@
           <p:cNvPr id="2" name="Titel 1">
             <a:extLst>
               <a:ext uri="{FF2B5EF4-FFF2-40B4-BE49-F238E27FC236}">
-                <a16:creationId xmlns:a16="http://schemas.microsoft.com/office/drawing/2014/main" id="{1165EFA3-C4F5-FCDD-85CC-F6A17A9C8793}"/>
+                <a16:creationId xmlns:a16="http://schemas.microsoft.com/office/drawing/2014/main" id="{2059DE7A-A500-29B8-727F-4D79AA877BD5}"/>
               </a:ext>
             </a:extLst>
           </p:cNvPr>
@@ -1936,7 +1935,7 @@
           <p:cNvPr id="3" name="Datumsplatzhalter 2">
             <a:extLst>
               <a:ext uri="{FF2B5EF4-FFF2-40B4-BE49-F238E27FC236}">
-                <a16:creationId xmlns:a16="http://schemas.microsoft.com/office/drawing/2014/main" id="{B124E590-7058-18F1-F435-852F71DC0A04}"/>
+                <a16:creationId xmlns:a16="http://schemas.microsoft.com/office/drawing/2014/main" id="{DFD8C8EA-18DF-17DF-9BF7-C4D809BB4951}"/>
               </a:ext>
             </a:extLst>
           </p:cNvPr>
@@ -1952,7 +1951,7 @@
           <a:bodyPr/>
           <a:lstStyle/>
           <a:p>
-            <a:fld id="{081FD6A1-9468-4C5D-9F84-F69311F8BE43}" type="datetimeFigureOut">
+            <a:fld id="{EB0DE66F-2E1A-48BE-8876-66A3D9EE38A7}" type="datetimeFigureOut">
               <a:rPr lang="de-DE" smtClean="0"/>
               <a:t>08.10.2026</a:t>
             </a:fld>
@@ -1965,7 +1964,7 @@
           <p:cNvPr id="4" name="Fußzeilenplatzhalter 3">
             <a:extLst>
               <a:ext uri="{FF2B5EF4-FFF2-40B4-BE49-F238E27FC236}">
-                <a16:creationId xmlns:a16="http://schemas.microsoft.com/office/drawing/2014/main" id="{999DCC68-6972-C1A2-7447-6B161E67BE3D}"/>
+                <a16:creationId xmlns:a16="http://schemas.microsoft.com/office/drawing/2014/main" id="{69B37E0A-C255-1127-4762-1E476F997F0B}"/>
               </a:ext>
             </a:extLst>
           </p:cNvPr>
@@ -1990,7 +1989,7 @@
           <p:cNvPr id="5" name="Foliennummernplatzhalter 4">
             <a:extLst>
               <a:ext uri="{FF2B5EF4-FFF2-40B4-BE49-F238E27FC236}">
-                <a16:creationId xmlns:a16="http://schemas.microsoft.com/office/drawing/2014/main" id="{CD431433-087F-7D7B-C7F9-A81D9F4F9759}"/>
+                <a16:creationId xmlns:a16="http://schemas.microsoft.com/office/drawing/2014/main" id="{DBF4CBCF-3089-39FF-068F-DEDFCE1E418E}"/>
               </a:ext>
             </a:extLst>
           </p:cNvPr>
@@ -2006,7 +2005,7 @@
           <a:bodyPr/>
           <a:lstStyle/>
           <a:p>
-            <a:fld id="{A54C93F7-1D14-45B6-B029-7B0271738C98}" type="slidenum">
+            <a:fld id="{79D103F6-AF16-461F-9E44-EE55414EE681}" type="slidenum">
               <a:rPr lang="de-DE" smtClean="0"/>
               <a:t>‹Nr.›</a:t>
             </a:fld>
@@ -2017,7 +2016,7 @@
     </p:spTree>
     <p:extLst>
       <p:ext uri="{BB962C8B-B14F-4D97-AF65-F5344CB8AC3E}">
-        <p14:creationId xmlns:p14="http://schemas.microsoft.com/office/powerpoint/2010/main" val="1781823381"/>
+        <p14:creationId xmlns:p14="http://schemas.microsoft.com/office/powerpoint/2010/main" val="2892980364"/>
       </p:ext>
     </p:extLst>
   </p:cSld>
@@ -2049,7 +2048,7 @@
           <p:cNvPr id="2" name="Datumsplatzhalter 1">
             <a:extLst>
               <a:ext uri="{FF2B5EF4-FFF2-40B4-BE49-F238E27FC236}">
-                <a16:creationId xmlns:a16="http://schemas.microsoft.com/office/drawing/2014/main" id="{F7FA4276-C030-44D3-A1A2-932B91F87887}"/>
+                <a16:creationId xmlns:a16="http://schemas.microsoft.com/office/drawing/2014/main" id="{A33B3476-1862-D927-610F-047A330ACFAB}"/>
               </a:ext>
             </a:extLst>
           </p:cNvPr>
@@ -2065,7 +2064,7 @@
           <a:bodyPr/>
           <a:lstStyle/>
           <a:p>
-            <a:fld id="{081FD6A1-9468-4C5D-9F84-F69311F8BE43}" type="datetimeFigureOut">
+            <a:fld id="{EB0DE66F-2E1A-48BE-8876-66A3D9EE38A7}" type="datetimeFigureOut">
               <a:rPr lang="de-DE" smtClean="0"/>
               <a:t>08.10.2026</a:t>
             </a:fld>
@@ -2078,7 +2077,7 @@
           <p:cNvPr id="3" name="Fußzeilenplatzhalter 2">
             <a:extLst>
               <a:ext uri="{FF2B5EF4-FFF2-40B4-BE49-F238E27FC236}">
-                <a16:creationId xmlns:a16="http://schemas.microsoft.com/office/drawing/2014/main" id="{FD528AA7-3617-331B-0984-88A34CD157F7}"/>
+                <a16:creationId xmlns:a16="http://schemas.microsoft.com/office/drawing/2014/main" id="{CCD17200-BEE4-DD0D-5E0A-8B8F7E2DB539}"/>
               </a:ext>
             </a:extLst>
           </p:cNvPr>
@@ -2103,7 +2102,7 @@
           <p:cNvPr id="4" name="Foliennummernplatzhalter 3">
             <a:extLst>
               <a:ext uri="{FF2B5EF4-FFF2-40B4-BE49-F238E27FC236}">
-                <a16:creationId xmlns:a16="http://schemas.microsoft.com/office/drawing/2014/main" id="{25039FC8-A819-7DB7-BB1C-E01E26E15094}"/>
+                <a16:creationId xmlns:a16="http://schemas.microsoft.com/office/drawing/2014/main" id="{AB193180-8E3B-3C3C-1DD5-DEE9403DF6A3}"/>
               </a:ext>
             </a:extLst>
           </p:cNvPr>
@@ -2119,7 +2118,7 @@
           <a:bodyPr/>
           <a:lstStyle/>
           <a:p>
-            <a:fld id="{A54C93F7-1D14-45B6-B029-7B0271738C98}" type="slidenum">
+            <a:fld id="{79D103F6-AF16-461F-9E44-EE55414EE681}" type="slidenum">
               <a:rPr lang="de-DE" smtClean="0"/>
               <a:t>‹Nr.›</a:t>
             </a:fld>
@@ -2130,7 +2129,7 @@
     </p:spTree>
     <p:extLst>
       <p:ext uri="{BB962C8B-B14F-4D97-AF65-F5344CB8AC3E}">
-        <p14:creationId xmlns:p14="http://schemas.microsoft.com/office/powerpoint/2010/main" val="2500698547"/>
+        <p14:creationId xmlns:p14="http://schemas.microsoft.com/office/powerpoint/2010/main" val="292878266"/>
       </p:ext>
     </p:extLst>
   </p:cSld>
@@ -2162,7 +2161,7 @@
           <p:cNvPr id="2" name="Titel 1">
             <a:extLst>
               <a:ext uri="{FF2B5EF4-FFF2-40B4-BE49-F238E27FC236}">
-                <a16:creationId xmlns:a16="http://schemas.microsoft.com/office/drawing/2014/main" id="{D6D00304-5D55-550B-78A0-292624C16F87}"/>
+                <a16:creationId xmlns:a16="http://schemas.microsoft.com/office/drawing/2014/main" id="{534BB746-790E-053A-153A-E263E364F237}"/>
               </a:ext>
             </a:extLst>
           </p:cNvPr>
@@ -2199,7 +2198,7 @@
           <p:cNvPr id="3" name="Inhaltsplatzhalter 2">
             <a:extLst>
               <a:ext uri="{FF2B5EF4-FFF2-40B4-BE49-F238E27FC236}">
-                <a16:creationId xmlns:a16="http://schemas.microsoft.com/office/drawing/2014/main" id="{04989125-37EF-BB05-FD65-C6DA990DFA4A}"/>
+                <a16:creationId xmlns:a16="http://schemas.microsoft.com/office/drawing/2014/main" id="{26FF6E11-5670-D2FE-15D8-E22DB1657C7C}"/>
               </a:ext>
             </a:extLst>
           </p:cNvPr>
@@ -2289,7 +2288,7 @@
           <p:cNvPr id="4" name="Textplatzhalter 3">
             <a:extLst>
               <a:ext uri="{FF2B5EF4-FFF2-40B4-BE49-F238E27FC236}">
-                <a16:creationId xmlns:a16="http://schemas.microsoft.com/office/drawing/2014/main" id="{FC0DFDDB-5945-777F-6CE5-22E9DD5A4491}"/>
+                <a16:creationId xmlns:a16="http://schemas.microsoft.com/office/drawing/2014/main" id="{714E91B5-108B-19B1-0C30-0E9B6021B88A}"/>
               </a:ext>
             </a:extLst>
           </p:cNvPr>
@@ -2360,7 +2359,7 @@
           <p:cNvPr id="5" name="Datumsplatzhalter 4">
             <a:extLst>
               <a:ext uri="{FF2B5EF4-FFF2-40B4-BE49-F238E27FC236}">
-                <a16:creationId xmlns:a16="http://schemas.microsoft.com/office/drawing/2014/main" id="{170A88AD-CB51-3E3A-95D9-2AE84E207AB6}"/>
+                <a16:creationId xmlns:a16="http://schemas.microsoft.com/office/drawing/2014/main" id="{DFEF13A6-F155-ED36-8F2A-14DA97807245}"/>
               </a:ext>
             </a:extLst>
           </p:cNvPr>
@@ -2376,7 +2375,7 @@
           <a:bodyPr/>
           <a:lstStyle/>
           <a:p>
-            <a:fld id="{081FD6A1-9468-4C5D-9F84-F69311F8BE43}" type="datetimeFigureOut">
+            <a:fld id="{EB0DE66F-2E1A-48BE-8876-66A3D9EE38A7}" type="datetimeFigureOut">
               <a:rPr lang="de-DE" smtClean="0"/>
               <a:t>08.10.2026</a:t>
             </a:fld>
@@ -2389,7 +2388,7 @@
           <p:cNvPr id="6" name="Fußzeilenplatzhalter 5">
             <a:extLst>
               <a:ext uri="{FF2B5EF4-FFF2-40B4-BE49-F238E27FC236}">
-                <a16:creationId xmlns:a16="http://schemas.microsoft.com/office/drawing/2014/main" id="{EEFE3331-A1B4-0A55-6B80-4A535D960C68}"/>
+                <a16:creationId xmlns:a16="http://schemas.microsoft.com/office/drawing/2014/main" id="{5DF48E19-2D49-34BE-52FF-7780FA630B47}"/>
               </a:ext>
             </a:extLst>
           </p:cNvPr>
@@ -2414,7 +2413,7 @@
           <p:cNvPr id="7" name="Foliennummernplatzhalter 6">
             <a:extLst>
               <a:ext uri="{FF2B5EF4-FFF2-40B4-BE49-F238E27FC236}">
-                <a16:creationId xmlns:a16="http://schemas.microsoft.com/office/drawing/2014/main" id="{DC0CB480-48D7-36AB-7493-96A2BAC73A1D}"/>
+                <a16:creationId xmlns:a16="http://schemas.microsoft.com/office/drawing/2014/main" id="{04AC1A8C-22AB-57CC-AA07-CC4D30B3705D}"/>
               </a:ext>
             </a:extLst>
           </p:cNvPr>
@@ -2430,7 +2429,7 @@
           <a:bodyPr/>
           <a:lstStyle/>
           <a:p>
-            <a:fld id="{A54C93F7-1D14-45B6-B029-7B0271738C98}" type="slidenum">
+            <a:fld id="{79D103F6-AF16-461F-9E44-EE55414EE681}" type="slidenum">
               <a:rPr lang="de-DE" smtClean="0"/>
               <a:t>‹Nr.›</a:t>
             </a:fld>
@@ -2441,7 +2440,7 @@
     </p:spTree>
     <p:extLst>
       <p:ext uri="{BB962C8B-B14F-4D97-AF65-F5344CB8AC3E}">
-        <p14:creationId xmlns:p14="http://schemas.microsoft.com/office/powerpoint/2010/main" val="1776344585"/>
+        <p14:creationId xmlns:p14="http://schemas.microsoft.com/office/powerpoint/2010/main" val="594694237"/>
       </p:ext>
     </p:extLst>
   </p:cSld>
@@ -2473,7 +2472,7 @@
           <p:cNvPr id="2" name="Titel 1">
             <a:extLst>
               <a:ext uri="{FF2B5EF4-FFF2-40B4-BE49-F238E27FC236}">
-                <a16:creationId xmlns:a16="http://schemas.microsoft.com/office/drawing/2014/main" id="{60553B12-C98B-6076-27B2-639B146253E2}"/>
+                <a16:creationId xmlns:a16="http://schemas.microsoft.com/office/drawing/2014/main" id="{A20CB34C-5A4E-555E-9EB1-0EDE30F665EA}"/>
               </a:ext>
             </a:extLst>
           </p:cNvPr>
@@ -2510,7 +2509,7 @@
           <p:cNvPr id="3" name="Bildplatzhalter 2">
             <a:extLst>
               <a:ext uri="{FF2B5EF4-FFF2-40B4-BE49-F238E27FC236}">
-                <a16:creationId xmlns:a16="http://schemas.microsoft.com/office/drawing/2014/main" id="{E9C73EFF-93FE-C3B7-0715-D8E326997F6A}"/>
+                <a16:creationId xmlns:a16="http://schemas.microsoft.com/office/drawing/2014/main" id="{5EEBE105-7435-6EA2-06FD-859C45944541}"/>
               </a:ext>
             </a:extLst>
           </p:cNvPr>
@@ -2577,7 +2576,7 @@
           <p:cNvPr id="4" name="Textplatzhalter 3">
             <a:extLst>
               <a:ext uri="{FF2B5EF4-FFF2-40B4-BE49-F238E27FC236}">
-                <a16:creationId xmlns:a16="http://schemas.microsoft.com/office/drawing/2014/main" id="{AA032351-4BAD-2C03-9A89-C4BD0A9A1725}"/>
+                <a16:creationId xmlns:a16="http://schemas.microsoft.com/office/drawing/2014/main" id="{52DA68A4-E666-FB85-C0C2-16D94E5DA8D9}"/>
               </a:ext>
             </a:extLst>
           </p:cNvPr>
@@ -2648,7 +2647,7 @@
           <p:cNvPr id="5" name="Datumsplatzhalter 4">
             <a:extLst>
               <a:ext uri="{FF2B5EF4-FFF2-40B4-BE49-F238E27FC236}">
-                <a16:creationId xmlns:a16="http://schemas.microsoft.com/office/drawing/2014/main" id="{9BDE084D-8B56-F637-0678-B00AC9B8F5CD}"/>
+                <a16:creationId xmlns:a16="http://schemas.microsoft.com/office/drawing/2014/main" id="{F0BC5164-61E7-C968-0A22-A3994307C9E1}"/>
               </a:ext>
             </a:extLst>
           </p:cNvPr>
@@ -2664,7 +2663,7 @@
           <a:bodyPr/>
           <a:lstStyle/>
           <a:p>
-            <a:fld id="{081FD6A1-9468-4C5D-9F84-F69311F8BE43}" type="datetimeFigureOut">
+            <a:fld id="{EB0DE66F-2E1A-48BE-8876-66A3D9EE38A7}" type="datetimeFigureOut">
               <a:rPr lang="de-DE" smtClean="0"/>
               <a:t>08.10.2026</a:t>
             </a:fld>
@@ -2677,7 +2676,7 @@
           <p:cNvPr id="6" name="Fußzeilenplatzhalter 5">
             <a:extLst>
               <a:ext uri="{FF2B5EF4-FFF2-40B4-BE49-F238E27FC236}">
-                <a16:creationId xmlns:a16="http://schemas.microsoft.com/office/drawing/2014/main" id="{EEBB56B5-377D-6B63-9C01-A015535164B7}"/>
+                <a16:creationId xmlns:a16="http://schemas.microsoft.com/office/drawing/2014/main" id="{2CD46345-13BB-1E68-C5D4-6A0F82AFB33C}"/>
               </a:ext>
             </a:extLst>
           </p:cNvPr>
@@ -2702,7 +2701,7 @@
           <p:cNvPr id="7" name="Foliennummernplatzhalter 6">
             <a:extLst>
               <a:ext uri="{FF2B5EF4-FFF2-40B4-BE49-F238E27FC236}">
-                <a16:creationId xmlns:a16="http://schemas.microsoft.com/office/drawing/2014/main" id="{71A55C01-C9E6-C6DF-8F36-0088F7C70EB7}"/>
+                <a16:creationId xmlns:a16="http://schemas.microsoft.com/office/drawing/2014/main" id="{995A8185-4053-64EA-C521-B131385C9DC1}"/>
               </a:ext>
             </a:extLst>
           </p:cNvPr>
@@ -2718,7 +2717,7 @@
           <a:bodyPr/>
           <a:lstStyle/>
           <a:p>
-            <a:fld id="{A54C93F7-1D14-45B6-B029-7B0271738C98}" type="slidenum">
+            <a:fld id="{79D103F6-AF16-461F-9E44-EE55414EE681}" type="slidenum">
               <a:rPr lang="de-DE" smtClean="0"/>
               <a:t>‹Nr.›</a:t>
             </a:fld>
@@ -2729,7 +2728,7 @@
     </p:spTree>
     <p:extLst>
       <p:ext uri="{BB962C8B-B14F-4D97-AF65-F5344CB8AC3E}">
-        <p14:creationId xmlns:p14="http://schemas.microsoft.com/office/powerpoint/2010/main" val="1995503176"/>
+        <p14:creationId xmlns:p14="http://schemas.microsoft.com/office/powerpoint/2010/main" val="1416130910"/>
       </p:ext>
     </p:extLst>
   </p:cSld>
@@ -2766,7 +2765,7 @@
           <p:cNvPr id="2" name="Titelplatzhalter 1">
             <a:extLst>
               <a:ext uri="{FF2B5EF4-FFF2-40B4-BE49-F238E27FC236}">
-                <a16:creationId xmlns:a16="http://schemas.microsoft.com/office/drawing/2014/main" id="{88462324-3C1C-96E4-9346-CA541B38626D}"/>
+                <a16:creationId xmlns:a16="http://schemas.microsoft.com/office/drawing/2014/main" id="{95AC3B02-F1BA-6F6D-77A6-FCACBB2BD74C}"/>
               </a:ext>
             </a:extLst>
           </p:cNvPr>
@@ -2804,7 +2803,7 @@
           <p:cNvPr id="3" name="Textplatzhalter 2">
             <a:extLst>
               <a:ext uri="{FF2B5EF4-FFF2-40B4-BE49-F238E27FC236}">
-                <a16:creationId xmlns:a16="http://schemas.microsoft.com/office/drawing/2014/main" id="{72120D95-3B45-DAFB-0D96-F241FCC4D546}"/>
+                <a16:creationId xmlns:a16="http://schemas.microsoft.com/office/drawing/2014/main" id="{D3156431-7443-3227-ED76-93CB5B6FAC40}"/>
               </a:ext>
             </a:extLst>
           </p:cNvPr>
@@ -2871,7 +2870,7 @@
           <p:cNvPr id="4" name="Datumsplatzhalter 3">
             <a:extLst>
               <a:ext uri="{FF2B5EF4-FFF2-40B4-BE49-F238E27FC236}">
-                <a16:creationId xmlns:a16="http://schemas.microsoft.com/office/drawing/2014/main" id="{E62F0945-7308-1D77-795B-CC961927130C}"/>
+                <a16:creationId xmlns:a16="http://schemas.microsoft.com/office/drawing/2014/main" id="{7919AF76-7438-50D8-411F-75BAFEB585FA}"/>
               </a:ext>
             </a:extLst>
           </p:cNvPr>
@@ -2905,7 +2904,7 @@
             </a:lvl1pPr>
           </a:lstStyle>
           <a:p>
-            <a:fld id="{081FD6A1-9468-4C5D-9F84-F69311F8BE43}" type="datetimeFigureOut">
+            <a:fld id="{EB0DE66F-2E1A-48BE-8876-66A3D9EE38A7}" type="datetimeFigureOut">
               <a:rPr lang="de-DE" smtClean="0"/>
               <a:t>08.10.2026</a:t>
             </a:fld>
@@ -2918,7 +2917,7 @@
           <p:cNvPr id="5" name="Fußzeilenplatzhalter 4">
             <a:extLst>
               <a:ext uri="{FF2B5EF4-FFF2-40B4-BE49-F238E27FC236}">
-                <a16:creationId xmlns:a16="http://schemas.microsoft.com/office/drawing/2014/main" id="{A26CDE4A-0D09-10ED-A399-9192498530EB}"/>
+                <a16:creationId xmlns:a16="http://schemas.microsoft.com/office/drawing/2014/main" id="{C8C5D112-5BFD-36CA-6254-D5A84178FC18}"/>
               </a:ext>
             </a:extLst>
           </p:cNvPr>
@@ -2961,7 +2960,7 @@
           <p:cNvPr id="6" name="Foliennummernplatzhalter 5">
             <a:extLst>
               <a:ext uri="{FF2B5EF4-FFF2-40B4-BE49-F238E27FC236}">
-                <a16:creationId xmlns:a16="http://schemas.microsoft.com/office/drawing/2014/main" id="{7EE54407-6D5C-BBF7-EC9B-1C8B2453714F}"/>
+                <a16:creationId xmlns:a16="http://schemas.microsoft.com/office/drawing/2014/main" id="{6FFED184-0684-8D75-B7C1-5891DA6B68F7}"/>
               </a:ext>
             </a:extLst>
           </p:cNvPr>
@@ -2995,7 +2994,7 @@
             </a:lvl1pPr>
           </a:lstStyle>
           <a:p>
-            <a:fld id="{A54C93F7-1D14-45B6-B029-7B0271738C98}" type="slidenum">
+            <a:fld id="{79D103F6-AF16-461F-9E44-EE55414EE681}" type="slidenum">
               <a:rPr lang="de-DE" smtClean="0"/>
               <a:t>‹Nr.›</a:t>
             </a:fld>
@@ -3006,7 +3005,7 @@
     </p:spTree>
     <p:extLst>
       <p:ext uri="{BB962C8B-B14F-4D97-AF65-F5344CB8AC3E}">
-        <p14:creationId xmlns:p14="http://schemas.microsoft.com/office/powerpoint/2010/main" val="91857073"/>
+        <p14:creationId xmlns:p14="http://schemas.microsoft.com/office/powerpoint/2010/main" val="2784544273"/>
       </p:ext>
     </p:extLst>
   </p:cSld>
@@ -3329,7 +3328,7 @@
           <p:cNvPr id="3" name="Grafik 2">
             <a:extLst>
               <a:ext uri="{FF2B5EF4-FFF2-40B4-BE49-F238E27FC236}">
-                <a16:creationId xmlns:a16="http://schemas.microsoft.com/office/drawing/2014/main" id="{87BA1B63-6A21-E623-2AFC-9D836E2BFAC5}"/>
+                <a16:creationId xmlns:a16="http://schemas.microsoft.com/office/drawing/2014/main" id="{529BF925-7631-1C20-B561-1481EF6D4B8C}"/>
               </a:ext>
             </a:extLst>
           </p:cNvPr>
@@ -3365,7 +3364,7 @@
           <p:cNvPr id="5" name="Grafik 4">
             <a:extLst>
               <a:ext uri="{FF2B5EF4-FFF2-40B4-BE49-F238E27FC236}">
-                <a16:creationId xmlns:a16="http://schemas.microsoft.com/office/drawing/2014/main" id="{952D7B0B-877E-FFCC-4B5A-344AA93B7F61}"/>
+                <a16:creationId xmlns:a16="http://schemas.microsoft.com/office/drawing/2014/main" id="{25256A95-17E0-5A2B-4ADB-ECA935DA86EE}"/>
               </a:ext>
             </a:extLst>
           </p:cNvPr>
@@ -3402,7 +3401,7 @@
           <p:cNvPr id="7" name="Grafik 6">
             <a:extLst>
               <a:ext uri="{FF2B5EF4-FFF2-40B4-BE49-F238E27FC236}">
-                <a16:creationId xmlns:a16="http://schemas.microsoft.com/office/drawing/2014/main" id="{88851CE6-4850-BD61-E4FB-453DEF9F6F56}"/>
+                <a16:creationId xmlns:a16="http://schemas.microsoft.com/office/drawing/2014/main" id="{DE5DE960-56CF-2E22-714D-740B953B769A}"/>
               </a:ext>
             </a:extLst>
           </p:cNvPr>
@@ -3438,7 +3437,7 @@
           <p:cNvPr id="9" name="Grafik 8">
             <a:extLst>
               <a:ext uri="{FF2B5EF4-FFF2-40B4-BE49-F238E27FC236}">
-                <a16:creationId xmlns:a16="http://schemas.microsoft.com/office/drawing/2014/main" id="{0CDAF2F4-2C1A-8EB6-70BC-2AFBA7141D73}"/>
+                <a16:creationId xmlns:a16="http://schemas.microsoft.com/office/drawing/2014/main" id="{E5B67811-6155-3428-E496-13FB8E76F557}"/>
               </a:ext>
             </a:extLst>
           </p:cNvPr>
@@ -3479,7 +3478,7 @@
           <p:cNvPr id="11" name="Grafik 10">
             <a:extLst>
               <a:ext uri="{FF2B5EF4-FFF2-40B4-BE49-F238E27FC236}">
-                <a16:creationId xmlns:a16="http://schemas.microsoft.com/office/drawing/2014/main" id="{EA73FC48-08FE-26A6-C842-CF1D989AA85C}"/>
+                <a16:creationId xmlns:a16="http://schemas.microsoft.com/office/drawing/2014/main" id="{1F05D73D-B700-F035-5051-FC54FF1146A7}"/>
               </a:ext>
             </a:extLst>
           </p:cNvPr>
@@ -3515,7 +3514,7 @@
           <p:cNvPr id="13" name="Grafik 12">
             <a:extLst>
               <a:ext uri="{FF2B5EF4-FFF2-40B4-BE49-F238E27FC236}">
-                <a16:creationId xmlns:a16="http://schemas.microsoft.com/office/drawing/2014/main" id="{8F558364-AA28-4592-C577-FAABC15E0167}"/>
+                <a16:creationId xmlns:a16="http://schemas.microsoft.com/office/drawing/2014/main" id="{833B1B41-4592-45AF-5721-348C6E042664}"/>
               </a:ext>
             </a:extLst>
           </p:cNvPr>
@@ -3549,7 +3548,7 @@
     </p:spTree>
     <p:extLst>
       <p:ext uri="{BB962C8B-B14F-4D97-AF65-F5344CB8AC3E}">
-        <p14:creationId xmlns:p14="http://schemas.microsoft.com/office/powerpoint/2010/main" val="2442959412"/>
+        <p14:creationId xmlns:p14="http://schemas.microsoft.com/office/powerpoint/2010/main" val="3510321914"/>
       </p:ext>
     </p:extLst>
   </p:cSld>
@@ -3581,7 +3580,7 @@
           <p:cNvPr id="2" name="Titel 1">
             <a:extLst>
               <a:ext uri="{FF2B5EF4-FFF2-40B4-BE49-F238E27FC236}">
-                <a16:creationId xmlns:a16="http://schemas.microsoft.com/office/drawing/2014/main" id="{1217303D-F3AD-2944-AED6-F156A11D0256}"/>
+                <a16:creationId xmlns:a16="http://schemas.microsoft.com/office/drawing/2014/main" id="{31BEC8D3-0560-25E3-4C33-FA7220B67100}"/>
               </a:ext>
             </a:extLst>
           </p:cNvPr>
@@ -3609,7 +3608,7 @@
           <p:cNvPr id="3" name="Tabelle 2">
             <a:extLst>
               <a:ext uri="{FF2B5EF4-FFF2-40B4-BE49-F238E27FC236}">
-                <a16:creationId xmlns:a16="http://schemas.microsoft.com/office/drawing/2014/main" id="{899FE4CE-6714-94F0-2843-7071A2BCA635}"/>
+                <a16:creationId xmlns:a16="http://schemas.microsoft.com/office/drawing/2014/main" id="{611C4CFF-2050-000C-664B-F34151F8DA35}"/>
               </a:ext>
             </a:extLst>
           </p:cNvPr>
@@ -3619,7 +3618,7 @@
           <p:nvPr>
             <p:extLst>
               <p:ext uri="{D42A27DB-BD31-4B8C-83A1-F6EECF244321}">
-                <p14:modId xmlns:p14="http://schemas.microsoft.com/office/powerpoint/2010/main" val="3028987114"/>
+                <p14:modId xmlns:p14="http://schemas.microsoft.com/office/powerpoint/2010/main" val="490570831"/>
               </p:ext>
             </p:extLst>
           </p:nvPr>
@@ -3638,28 +3637,28 @@
                 <a:gridCol w="1333500">
                   <a:extLst>
                     <a:ext uri="{9D8B030D-6E8A-4147-A177-3AD203B41FA5}">
-                      <a16:colId xmlns:a16="http://schemas.microsoft.com/office/drawing/2014/main" val="3664428532"/>
+                      <a16:colId xmlns:a16="http://schemas.microsoft.com/office/drawing/2014/main" val="904035219"/>
                     </a:ext>
                   </a:extLst>
                 </a:gridCol>
                 <a:gridCol w="1333500">
                   <a:extLst>
                     <a:ext uri="{9D8B030D-6E8A-4147-A177-3AD203B41FA5}">
-                      <a16:colId xmlns:a16="http://schemas.microsoft.com/office/drawing/2014/main" val="1568380220"/>
+                      <a16:colId xmlns:a16="http://schemas.microsoft.com/office/drawing/2014/main" val="143399549"/>
                     </a:ext>
                   </a:extLst>
                 </a:gridCol>
                 <a:gridCol w="1333500">
                   <a:extLst>
                     <a:ext uri="{9D8B030D-6E8A-4147-A177-3AD203B41FA5}">
-                      <a16:colId xmlns:a16="http://schemas.microsoft.com/office/drawing/2014/main" val="4146569293"/>
+                      <a16:colId xmlns:a16="http://schemas.microsoft.com/office/drawing/2014/main" val="658348115"/>
                     </a:ext>
                   </a:extLst>
                 </a:gridCol>
                 <a:gridCol w="1333500">
                   <a:extLst>
                     <a:ext uri="{9D8B030D-6E8A-4147-A177-3AD203B41FA5}">
-                      <a16:colId xmlns:a16="http://schemas.microsoft.com/office/drawing/2014/main" val="1542652068"/>
+                      <a16:colId xmlns:a16="http://schemas.microsoft.com/office/drawing/2014/main" val="1872218623"/>
                     </a:ext>
                   </a:extLst>
                 </a:gridCol>
@@ -3719,7 +3718,7 @@
                 </a:tc>
                 <a:extLst>
                   <a:ext uri="{0D108BD9-81ED-4DB2-BD59-A6C34878D82A}">
-                    <a16:rowId xmlns:a16="http://schemas.microsoft.com/office/drawing/2014/main" val="1953323450"/>
+                    <a16:rowId xmlns:a16="http://schemas.microsoft.com/office/drawing/2014/main" val="3277254254"/>
                   </a:ext>
                 </a:extLst>
               </a:tr>
@@ -3778,7 +3777,7 @@
                 </a:tc>
                 <a:extLst>
                   <a:ext uri="{0D108BD9-81ED-4DB2-BD59-A6C34878D82A}">
-                    <a16:rowId xmlns:a16="http://schemas.microsoft.com/office/drawing/2014/main" val="1471296351"/>
+                    <a16:rowId xmlns:a16="http://schemas.microsoft.com/office/drawing/2014/main" val="1966796165"/>
                   </a:ext>
                 </a:extLst>
               </a:tr>
@@ -3837,7 +3836,7 @@
                 </a:tc>
                 <a:extLst>
                   <a:ext uri="{0D108BD9-81ED-4DB2-BD59-A6C34878D82A}">
-                    <a16:rowId xmlns:a16="http://schemas.microsoft.com/office/drawing/2014/main" val="2880130809"/>
+                    <a16:rowId xmlns:a16="http://schemas.microsoft.com/office/drawing/2014/main" val="3764731051"/>
                   </a:ext>
                 </a:extLst>
               </a:tr>
@@ -3896,7 +3895,7 @@
                 </a:tc>
                 <a:extLst>
                   <a:ext uri="{0D108BD9-81ED-4DB2-BD59-A6C34878D82A}">
-                    <a16:rowId xmlns:a16="http://schemas.microsoft.com/office/drawing/2014/main" val="1978688881"/>
+                    <a16:rowId xmlns:a16="http://schemas.microsoft.com/office/drawing/2014/main" val="998202445"/>
                   </a:ext>
                 </a:extLst>
               </a:tr>
@@ -3909,7 +3908,7 @@
           <p:cNvPr id="4" name="Tabelle 3">
             <a:extLst>
               <a:ext uri="{FF2B5EF4-FFF2-40B4-BE49-F238E27FC236}">
-                <a16:creationId xmlns:a16="http://schemas.microsoft.com/office/drawing/2014/main" id="{608CDD9B-9E51-45F1-B480-9358F7B86B8D}"/>
+                <a16:creationId xmlns:a16="http://schemas.microsoft.com/office/drawing/2014/main" id="{1DE6AFFB-D40A-3173-A456-95C93F5AE700}"/>
               </a:ext>
             </a:extLst>
           </p:cNvPr>
@@ -3919,7 +3918,7 @@
           <p:nvPr>
             <p:extLst>
               <p:ext uri="{D42A27DB-BD31-4B8C-83A1-F6EECF244321}">
-                <p14:modId xmlns:p14="http://schemas.microsoft.com/office/powerpoint/2010/main" val="2578559656"/>
+                <p14:modId xmlns:p14="http://schemas.microsoft.com/office/powerpoint/2010/main" val="4153091778"/>
               </p:ext>
             </p:extLst>
           </p:nvPr>
@@ -3938,21 +3937,21 @@
                 <a:gridCol w="1778000">
                   <a:extLst>
                     <a:ext uri="{9D8B030D-6E8A-4147-A177-3AD203B41FA5}">
-                      <a16:colId xmlns:a16="http://schemas.microsoft.com/office/drawing/2014/main" val="2691333642"/>
+                      <a16:colId xmlns:a16="http://schemas.microsoft.com/office/drawing/2014/main" val="1692011239"/>
                     </a:ext>
                   </a:extLst>
                 </a:gridCol>
                 <a:gridCol w="1778000">
                   <a:extLst>
                     <a:ext uri="{9D8B030D-6E8A-4147-A177-3AD203B41FA5}">
-                      <a16:colId xmlns:a16="http://schemas.microsoft.com/office/drawing/2014/main" val="3017382381"/>
+                      <a16:colId xmlns:a16="http://schemas.microsoft.com/office/drawing/2014/main" val="3285581908"/>
                     </a:ext>
                   </a:extLst>
                 </a:gridCol>
                 <a:gridCol w="1778000">
                   <a:extLst>
                     <a:ext uri="{9D8B030D-6E8A-4147-A177-3AD203B41FA5}">
-                      <a16:colId xmlns:a16="http://schemas.microsoft.com/office/drawing/2014/main" val="846952915"/>
+                      <a16:colId xmlns:a16="http://schemas.microsoft.com/office/drawing/2014/main" val="2490309040"/>
                     </a:ext>
                   </a:extLst>
                 </a:gridCol>
@@ -3996,7 +3995,7 @@
                 </a:tc>
                 <a:extLst>
                   <a:ext uri="{0D108BD9-81ED-4DB2-BD59-A6C34878D82A}">
-                    <a16:rowId xmlns:a16="http://schemas.microsoft.com/office/drawing/2014/main" val="438997509"/>
+                    <a16:rowId xmlns:a16="http://schemas.microsoft.com/office/drawing/2014/main" val="2021475823"/>
                   </a:ext>
                 </a:extLst>
               </a:tr>
@@ -4046,7 +4045,7 @@
                 </a:tc>
                 <a:extLst>
                   <a:ext uri="{0D108BD9-81ED-4DB2-BD59-A6C34878D82A}">
-                    <a16:rowId xmlns:a16="http://schemas.microsoft.com/office/drawing/2014/main" val="2301342887"/>
+                    <a16:rowId xmlns:a16="http://schemas.microsoft.com/office/drawing/2014/main" val="3568316375"/>
                   </a:ext>
                 </a:extLst>
               </a:tr>
@@ -4098,7 +4097,7 @@
                 </a:tc>
                 <a:extLst>
                   <a:ext uri="{0D108BD9-81ED-4DB2-BD59-A6C34878D82A}">
-                    <a16:rowId xmlns:a16="http://schemas.microsoft.com/office/drawing/2014/main" val="1750525030"/>
+                    <a16:rowId xmlns:a16="http://schemas.microsoft.com/office/drawing/2014/main" val="2419462000"/>
                   </a:ext>
                 </a:extLst>
               </a:tr>
@@ -4141,7 +4140,7 @@
                 </a:tc>
                 <a:extLst>
                   <a:ext uri="{0D108BD9-81ED-4DB2-BD59-A6C34878D82A}">
-                    <a16:rowId xmlns:a16="http://schemas.microsoft.com/office/drawing/2014/main" val="3274334907"/>
+                    <a16:rowId xmlns:a16="http://schemas.microsoft.com/office/drawing/2014/main" val="3727109013"/>
                   </a:ext>
                 </a:extLst>
               </a:tr>
@@ -4152,7 +4151,7 @@
     </p:spTree>
     <p:extLst>
       <p:ext uri="{BB962C8B-B14F-4D97-AF65-F5344CB8AC3E}">
-        <p14:creationId xmlns:p14="http://schemas.microsoft.com/office/powerpoint/2010/main" val="1167234718"/>
+        <p14:creationId xmlns:p14="http://schemas.microsoft.com/office/powerpoint/2010/main" val="3201797923"/>
       </p:ext>
     </p:extLst>
   </p:cSld>
@@ -4181,68 +4180,10 @@
       </p:grpSpPr>
       <p:sp>
         <p:nvSpPr>
-          <p:cNvPr id="2" name="Titel 1">
-            <a:extLst>
-              <a:ext uri="{FF2B5EF4-FFF2-40B4-BE49-F238E27FC236}">
-                <a16:creationId xmlns:a16="http://schemas.microsoft.com/office/drawing/2014/main" id="{EA1DA07B-DDB6-B6B1-9017-7512174A0293}"/>
-              </a:ext>
-            </a:extLst>
-          </p:cNvPr>
-          <p:cNvSpPr>
-            <a:spLocks noGrp="1"/>
-          </p:cNvSpPr>
-          <p:nvPr>
-            <p:ph type="title"/>
-          </p:nvPr>
-        </p:nvSpPr>
-        <p:spPr/>
-        <p:txBody>
-          <a:bodyPr/>
-          <a:lstStyle/>
-          <a:p>
-            <a:r>
-              <a:rPr lang="de-DE"/>
-              <a:t>SmartArt</a:t>
-            </a:r>
-          </a:p>
-        </p:txBody>
-      </p:sp>
-    </p:spTree>
-    <p:extLst>
-      <p:ext uri="{BB962C8B-B14F-4D97-AF65-F5344CB8AC3E}">
-        <p14:creationId xmlns:p14="http://schemas.microsoft.com/office/powerpoint/2010/main" val="4054412080"/>
-      </p:ext>
-    </p:extLst>
-  </p:cSld>
-  <p:clrMapOvr>
-    <a:masterClrMapping/>
-  </p:clrMapOvr>
-</p:sld>
-</file>
-
-<file path=ppt/slides/slide4.xml><?xml version="1.0" encoding="utf-8"?>
-<p:sld xmlns:a="http://schemas.openxmlformats.org/drawingml/2006/main" xmlns:r="http://schemas.openxmlformats.org/officeDocument/2006/relationships" xmlns:p="http://schemas.openxmlformats.org/presentationml/2006/main">
-  <p:cSld>
-    <p:spTree>
-      <p:nvGrpSpPr>
-        <p:cNvPr id="1" name=""/>
-        <p:cNvGrpSpPr/>
-        <p:nvPr/>
-      </p:nvGrpSpPr>
-      <p:grpSpPr>
-        <a:xfrm>
-          <a:off x="0" y="0"/>
-          <a:ext cx="0" cy="0"/>
-          <a:chOff x="0" y="0"/>
-          <a:chExt cx="0" cy="0"/>
-        </a:xfrm>
-      </p:grpSpPr>
-      <p:sp>
-        <p:nvSpPr>
           <p:cNvPr id="2" name="Rechteck: abgerundete Ecken 1">
             <a:extLst>
               <a:ext uri="{FF2B5EF4-FFF2-40B4-BE49-F238E27FC236}">
-                <a16:creationId xmlns:a16="http://schemas.microsoft.com/office/drawing/2014/main" id="{15E563D8-F378-E940-15B8-70446988C243}"/>
+                <a16:creationId xmlns:a16="http://schemas.microsoft.com/office/drawing/2014/main" id="{E85F97DE-F419-B0AB-1998-F19BC63CE4C2}"/>
               </a:ext>
             </a:extLst>
           </p:cNvPr>
@@ -4295,7 +4236,7 @@
           <p:cNvPr id="3" name="Ellipse 2">
             <a:extLst>
               <a:ext uri="{FF2B5EF4-FFF2-40B4-BE49-F238E27FC236}">
-                <a16:creationId xmlns:a16="http://schemas.microsoft.com/office/drawing/2014/main" id="{2B89F3AD-9149-1C0D-C41F-EFA67F184E73}"/>
+                <a16:creationId xmlns:a16="http://schemas.microsoft.com/office/drawing/2014/main" id="{C60A58D7-BAD9-1BE0-2357-71DC9D26E7D7}"/>
               </a:ext>
             </a:extLst>
           </p:cNvPr>
@@ -4346,7 +4287,7 @@
           <p:cNvPr id="4" name="Rechteck 3">
             <a:extLst>
               <a:ext uri="{FF2B5EF4-FFF2-40B4-BE49-F238E27FC236}">
-                <a16:creationId xmlns:a16="http://schemas.microsoft.com/office/drawing/2014/main" id="{A1D6D929-3716-9482-1E88-28BE3E825ADE}"/>
+                <a16:creationId xmlns:a16="http://schemas.microsoft.com/office/drawing/2014/main" id="{403E80B6-F972-7A03-80DD-CE3D1B72CE0E}"/>
               </a:ext>
             </a:extLst>
           </p:cNvPr>
@@ -4395,7 +4336,7 @@
           <p:cNvPr id="5" name="Stern: 5 Zacken 4">
             <a:extLst>
               <a:ext uri="{FF2B5EF4-FFF2-40B4-BE49-F238E27FC236}">
-                <a16:creationId xmlns:a16="http://schemas.microsoft.com/office/drawing/2014/main" id="{0FC7D7CB-B450-548A-59F0-EF3B923C7E8F}"/>
+                <a16:creationId xmlns:a16="http://schemas.microsoft.com/office/drawing/2014/main" id="{071C97C0-A38C-A4DC-FED6-D9A861EF29B7}"/>
               </a:ext>
             </a:extLst>
           </p:cNvPr>
@@ -4444,7 +4385,7 @@
           <p:cNvPr id="6" name="Rechteck 5">
             <a:extLst>
               <a:ext uri="{FF2B5EF4-FFF2-40B4-BE49-F238E27FC236}">
-                <a16:creationId xmlns:a16="http://schemas.microsoft.com/office/drawing/2014/main" id="{5284427F-8B3C-BFCB-3911-4A1805A6CBDE}"/>
+                <a16:creationId xmlns:a16="http://schemas.microsoft.com/office/drawing/2014/main" id="{5A7B9DD5-99A3-7BB1-9F23-624EF69371A0}"/>
               </a:ext>
             </a:extLst>
           </p:cNvPr>
@@ -4493,7 +4434,7 @@
           <p:cNvPr id="7" name="Textfeld 6">
             <a:extLst>
               <a:ext uri="{FF2B5EF4-FFF2-40B4-BE49-F238E27FC236}">
-                <a16:creationId xmlns:a16="http://schemas.microsoft.com/office/drawing/2014/main" id="{3B20C47A-1A52-452E-5278-710C33A23D0F}"/>
+                <a16:creationId xmlns:a16="http://schemas.microsoft.com/office/drawing/2014/main" id="{AD8F09F9-2D82-890F-EF63-90B3F575C778}"/>
               </a:ext>
             </a:extLst>
           </p:cNvPr>
@@ -4532,7 +4473,7 @@
     </p:spTree>
     <p:extLst>
       <p:ext uri="{BB962C8B-B14F-4D97-AF65-F5344CB8AC3E}">
-        <p14:creationId xmlns:p14="http://schemas.microsoft.com/office/powerpoint/2010/main" val="1560107106"/>
+        <p14:creationId xmlns:p14="http://schemas.microsoft.com/office/powerpoint/2010/main" val="2187245729"/>
       </p:ext>
     </p:extLst>
   </p:cSld>
